--- a/docs/slides/Threat-Shape.pptx
+++ b/docs/slides/Threat-Shape.pptx
@@ -4,6 +4,9 @@
   <p:sldMasterIdLst>
     <p:sldMasterId id="2147483648" r:id="rId1"/>
   </p:sldMasterIdLst>
+  <p:notesMasterIdLst>
+    <p:notesMasterId r:id="rId19"/>
+  </p:notesMasterIdLst>
   <p:sldIdLst>
     <p:sldId id="256" r:id="rId2"/>
     <p:sldId id="257" r:id="rId3"/>
@@ -23,10 +26,7 @@
     <p:sldId id="271" r:id="rId17"/>
     <p:sldId id="272" r:id="rId18"/>
   </p:sldIdLst>
-  <p:notesMasterIdLst>
-    <p:notesMasterId r:id="rId19"/>
-  </p:notesMasterIdLst>
-  <p:sldSz cx="9144000" cy="5143500"/>
+  <p:sldSz cx="9144000" cy="5143500" type="screen16x9"/>
   <p:notesSz cx="5143500" cy="9144000"/>
   <p:defaultTextStyle>
     <a:lvl1pPr marL="0" algn="l" defTabSz="914400" rtl="0" eaLnBrk="1" latinLnBrk="0" hangingPunct="1">
@@ -120,6 +120,11 @@
       </a:defRPr>
     </a:lvl9pPr>
   </p:defaultTextStyle>
+  <p:extLst>
+    <p:ext uri="{EFAFB233-063F-42B5-8137-9DF3F51BA10A}">
+      <p15:sldGuideLst xmlns:p15="http://schemas.microsoft.com/office/powerpoint/2012/main"/>
+    </p:ext>
+  </p:extLst>
 </p:presentation>
 </file>
 
@@ -145,234 +150,10 @@
           <a:chExt cx="0" cy="0"/>
         </a:xfrm>
       </p:grpSpPr>
-      <p:sp>
-        <p:nvSpPr>
-          <p:cNvPr id="2" name="Header Placeholder 1"/>
-          <p:cNvSpPr>
-            <a:spLocks noGrp="1"/>
-          </p:cNvSpPr>
-          <p:nvPr>
-            <p:ph type="hdr" sz="quarter"/>
-          </p:nvPr>
-        </p:nvSpPr>
-        <p:spPr>
-          <a:xfrm>
-            <a:off x="0" y="0"/>
-            <a:ext cx="2971800" cy="458788"/>
-          </a:xfrm>
-          <a:prstGeom prst="rect">
-            <a:avLst/>
-          </a:prstGeom>
-        </p:spPr>
-        <p:txBody>
-          <a:bodyPr vert="horz" lIns="91440" tIns="45720" rIns="91440" bIns="45720" rtlCol="0"/>
-          <a:lstStyle>
-            <a:lvl1pPr algn="l">
-              <a:defRPr sz="1200"/>
-            </a:lvl1pPr>
-          </a:lstStyle>
-          <a:p>
-            <a:endParaRPr lang="en-US"/>
-          </a:p>
-        </p:txBody>
-      </p:sp>
-      <p:sp>
-        <p:nvSpPr>
-          <p:cNvPr id="3" name="Date Placeholder 2"/>
-          <p:cNvSpPr>
-            <a:spLocks noGrp="1"/>
-          </p:cNvSpPr>
-          <p:nvPr>
-            <p:ph type="dt" idx="1"/>
-          </p:nvPr>
-        </p:nvSpPr>
-        <p:spPr>
-          <a:xfrm>
-            <a:off x="3884613" y="0"/>
-            <a:ext cx="2971800" cy="458788"/>
-          </a:xfrm>
-          <a:prstGeom prst="rect">
-            <a:avLst/>
-          </a:prstGeom>
-        </p:spPr>
-        <p:txBody>
-          <a:bodyPr vert="horz" lIns="91440" tIns="45720" rIns="91440" bIns="45720" rtlCol="0"/>
-          <a:lstStyle>
-            <a:lvl1pPr algn="r">
-              <a:defRPr sz="1200"/>
-            </a:lvl1pPr>
-          </a:lstStyle>
-          <a:p>
-            <a:fld id="{5282F153-3F37-0F45-9E97-73ACFA13230C}" type="datetimeFigureOut">
-              <a:rPr lang="en-US"/>
-              <a:t>7/23/19</a:t>
-            </a:fld>
-            <a:endParaRPr lang="en-US"/>
-          </a:p>
-        </p:txBody>
-      </p:sp>
-      <p:sp>
-        <p:nvSpPr>
-          <p:cNvPr id="4" name="Slide Image Placeholder 3"/>
-          <p:cNvSpPr>
-            <a:spLocks noGrp="1" noRot="1" noChangeAspect="1"/>
-          </p:cNvSpPr>
-          <p:nvPr>
-            <p:ph type="sldImg" idx="2"/>
-          </p:nvPr>
-        </p:nvSpPr>
-        <p:spPr>
-          <a:xfrm>
-            <a:off x="685800" y="1143000"/>
-            <a:ext cx="5486400" cy="3086100"/>
-          </a:xfrm>
-          <a:prstGeom prst="rect">
-            <a:avLst/>
-          </a:prstGeom>
-          <a:noFill/>
-          <a:ln w="12700">
-            <a:solidFill>
-              <a:prstClr val="black"/>
-            </a:solidFill>
-          </a:ln>
-        </p:spPr>
-        <p:txBody>
-          <a:bodyPr vert="horz" lIns="91440" tIns="45720" rIns="91440" bIns="45720" rtlCol="0" anchor="ctr"/>
-          <a:lstStyle/>
-          <a:p>
-            <a:endParaRPr lang="en-US"/>
-          </a:p>
-        </p:txBody>
-      </p:sp>
-      <p:sp>
-        <p:nvSpPr>
-          <p:cNvPr id="5" name="Notes Placeholder 4"/>
-          <p:cNvSpPr>
-            <a:spLocks noGrp="1"/>
-          </p:cNvSpPr>
-          <p:nvPr>
-            <p:ph type="body" sz="quarter" idx="3"/>
-          </p:nvPr>
-        </p:nvSpPr>
-        <p:spPr>
-          <a:xfrm>
-            <a:off x="685800" y="4400550"/>
-            <a:ext cx="5486400" cy="3600450"/>
-          </a:xfrm>
-          <a:prstGeom prst="rect">
-            <a:avLst/>
-          </a:prstGeom>
-        </p:spPr>
-        <p:txBody>
-          <a:bodyPr vert="horz" lIns="91440" tIns="45720" rIns="91440" bIns="45720" rtlCol="0"/>
-          <a:lstStyle/>
-          <a:p>
-            <a:pPr lvl="0"/>
-            <a:r>
-              <a:rPr lang="en-US"/>
-              <a:t>Click to edit Master text styles</a:t>
-            </a:r>
-          </a:p>
-          <a:p>
-            <a:pPr lvl="1"/>
-            <a:r>
-              <a:rPr lang="en-US"/>
-              <a:t>Second level</a:t>
-            </a:r>
-          </a:p>
-          <a:p>
-            <a:pPr lvl="2"/>
-            <a:r>
-              <a:rPr lang="en-US"/>
-              <a:t>Third level</a:t>
-            </a:r>
-          </a:p>
-          <a:p>
-            <a:pPr lvl="3"/>
-            <a:r>
-              <a:rPr lang="en-US"/>
-              <a:t>Fourth level</a:t>
-            </a:r>
-          </a:p>
-          <a:p>
-            <a:pPr lvl="4"/>
-            <a:r>
-              <a:rPr lang="en-US"/>
-              <a:t>Fifth level</a:t>
-            </a:r>
-          </a:p>
-        </p:txBody>
-      </p:sp>
-      <p:sp>
-        <p:nvSpPr>
-          <p:cNvPr id="6" name="Footer Placeholder 5"/>
-          <p:cNvSpPr>
-            <a:spLocks noGrp="1"/>
-          </p:cNvSpPr>
-          <p:nvPr>
-            <p:ph type="ftr" sz="quarter" idx="4"/>
-          </p:nvPr>
-        </p:nvSpPr>
-        <p:spPr>
-          <a:xfrm>
-            <a:off x="0" y="8685213"/>
-            <a:ext cx="2971800" cy="458787"/>
-          </a:xfrm>
-          <a:prstGeom prst="rect">
-            <a:avLst/>
-          </a:prstGeom>
-        </p:spPr>
-        <p:txBody>
-          <a:bodyPr vert="horz" lIns="91440" tIns="45720" rIns="91440" bIns="45720" rtlCol="0" anchor="b"/>
-          <a:lstStyle>
-            <a:lvl1pPr algn="l">
-              <a:defRPr sz="1200"/>
-            </a:lvl1pPr>
-          </a:lstStyle>
-          <a:p>
-            <a:endParaRPr lang="en-US"/>
-          </a:p>
-        </p:txBody>
-      </p:sp>
-      <p:sp>
-        <p:nvSpPr>
-          <p:cNvPr id="7" name="Slide Number Placeholder 6"/>
-          <p:cNvSpPr>
-            <a:spLocks noGrp="1"/>
-          </p:cNvSpPr>
-          <p:nvPr>
-            <p:ph type="sldNum" sz="quarter" idx="5"/>
-          </p:nvPr>
-        </p:nvSpPr>
-        <p:spPr>
-          <a:xfrm>
-            <a:off x="3884613" y="8685213"/>
-            <a:ext cx="2971800" cy="458787"/>
-          </a:xfrm>
-          <a:prstGeom prst="rect">
-            <a:avLst/>
-          </a:prstGeom>
-        </p:spPr>
-        <p:txBody>
-          <a:bodyPr vert="horz" lIns="91440" tIns="45720" rIns="91440" bIns="45720" rtlCol="0" anchor="b"/>
-          <a:lstStyle>
-            <a:lvl1pPr algn="r">
-              <a:defRPr sz="1200"/>
-            </a:lvl1pPr>
-          </a:lstStyle>
-          <a:p>
-            <a:fld id="{CE5E9CC1-C706-0F49-92D6-E571CC5EEA8F}" type="slidenum">
-              <a:rPr lang="en-US"/>
-              <a:t>‹#›</a:t>
-            </a:fld>
-            <a:endParaRPr lang="en-US"/>
-          </a:p>
-        </p:txBody>
-      </p:sp>
     </p:spTree>
     <p:extLst>
       <p:ext uri="{BB962C8B-B14F-4D97-AF65-F5344CB8AC3E}">
-        <p14:creationId xmlns:p14="http://schemas.microsoft.com/office/powerpoint/2010/main" val="1024086991"/>
+        <p14:creationId xmlns:p14="http://schemas.microsoft.com/office/powerpoint/2010/main" val="1153465325"/>
       </p:ext>
     </p:extLst>
   </p:cSld>
@@ -520,7 +301,6 @@
               <a:rPr lang="en-US" dirty="0"/>
               <a:t>Threat-Shape: a visual analytics tool over the European Repository of Cyber Incidents. Two of us, Samuele Proietti and Marco Alberti.</a:t>
             </a:r>
-            <a:endParaRPr lang="en-US" dirty="0"/>
           </a:p>
         </p:txBody>
       </p:sp>
@@ -608,7 +388,6 @@
               <a:rPr lang="en-US" dirty="0"/>
               <a:t>Each refusal is a design decision: an embedding of twelve points looks exactly as confident as one of twelve hundred.</a:t>
             </a:r>
-            <a:endParaRPr lang="en-US" dirty="0"/>
           </a:p>
         </p:txBody>
       </p:sp>
@@ -696,7 +475,6 @@
               <a:rPr lang="en-US" dirty="0"/>
               <a:t>This is what 'dimensionality reduction integrated in the analysis flow' means here: the projection is recomputed on the analyst's own selection.</a:t>
             </a:r>
-            <a:endParaRPr lang="en-US" dirty="0"/>
           </a:p>
         </p:txBody>
       </p:sp>
@@ -784,7 +562,6 @@
               <a:rPr lang="en-US" dirty="0"/>
               <a:t>A count-based dashboard reports 220 incidents against Russia and stops. These two groups differ by a factor of two in intensity.</a:t>
             </a:r>
-            <a:endParaRPr lang="en-US" dirty="0"/>
           </a:p>
         </p:txBody>
       </p:sp>
@@ -872,7 +649,6 @@
               <a:rPr lang="en-US" dirty="0"/>
               <a:t>A finding about the data, produced by our own contrast panel - and the trap the same panel sets. Compare characteristics only inside the homogeneous era.</a:t>
             </a:r>
-            <a:endParaRPr lang="en-US" dirty="0"/>
           </a:p>
         </p:txBody>
       </p:sp>
@@ -960,7 +736,6 @@
               <a:rPr lang="en-US" dirty="0"/>
               <a:t>The intuitive explanation - western CERTs attribute better - is backwards. What differs is who attacks them.</a:t>
             </a:r>
-            <a:endParaRPr lang="en-US" dirty="0"/>
           </a:p>
         </p:txBody>
       </p:sp>
@@ -1048,7 +823,6 @@
               <a:rPr lang="en-US" dirty="0"/>
               <a:t>No analytic is started by a menu, and no result exists before an interaction. Both are negative claims, so we made them testable.</a:t>
             </a:r>
-            <a:endParaRPr lang="en-US" dirty="0"/>
           </a:p>
         </p:txBody>
       </p:sp>
@@ -1136,7 +910,6 @@
               <a:rPr lang="en-US" dirty="0"/>
               <a:t>Limits stated up front; each of them is a decision we can defend rather than an oversight.</a:t>
             </a:r>
-            <a:endParaRPr lang="en-US" dirty="0"/>
           </a:p>
         </p:txBody>
       </p:sp>
@@ -1224,7 +997,6 @@
               <a:rPr lang="en-US" dirty="0"/>
               <a:t>Interaction belongs to the demo, so the deck stops here.</a:t>
             </a:r>
-            <a:endParaRPr lang="en-US" dirty="0"/>
           </a:p>
         </p:txBody>
       </p:sp>
@@ -1312,7 +1084,6 @@
               <a:rPr lang="en-US" dirty="0"/>
               <a:t>The official EuRepoC dashboard already answers the left column. Our user has to answer the right one, and today that means exporting the data and writing code.</a:t>
             </a:r>
-            <a:endParaRPr lang="en-US" dirty="0"/>
           </a:p>
         </p:txBody>
       </p:sp>
@@ -1400,7 +1171,6 @@
               <a:rPr lang="en-US" dirty="0"/>
               <a:t>The AS index is above the band on purpose. Counting the encoded width instead would give over 430,000 and would describe the encoding rather than the data.</a:t>
             </a:r>
-            <a:endParaRPr lang="en-US" dirty="0"/>
           </a:p>
         </p:txBody>
       </p:sp>
@@ -1488,7 +1258,6 @@
               <a:rPr lang="en-US" dirty="0"/>
               <a:t>Two reductions, two different roles: PCA denoises once, t-SNE is the one that runs again on a selection.</a:t>
             </a:r>
-            <a:endParaRPr lang="en-US" dirty="0"/>
           </a:p>
         </p:txBody>
       </p:sp>
@@ -1576,7 +1345,6 @@
               <a:rPr lang="en-US" dirty="0"/>
               <a:t>Each view is both a source and a target: a selection made anywhere is answered everywhere. No view talks to another directly - they share one selection store.</a:t>
             </a:r>
-            <a:endParaRPr lang="en-US" dirty="0"/>
           </a:p>
         </p:txBody>
       </p:sp>
@@ -1664,7 +1432,6 @@
               <a:rPr lang="en-US" dirty="0"/>
               <a:t>The map is the entry point. The details panel answers the three questions an analyst asks of a country before anything else.</a:t>
             </a:r>
-            <a:endParaRPr lang="en-US" dirty="0"/>
           </a:p>
         </p:txBody>
       </p:sp>
@@ -1752,7 +1519,6 @@
               <a:rPr lang="en-US" dirty="0"/>
               <a:t>This is the organising view. Neighbourhood means similarity of profile, which is the question the whole tool exists to answer.</a:t>
             </a:r>
-            <a:endParaRPr lang="en-US" dirty="0"/>
           </a:p>
         </p:txBody>
       </p:sp>
@@ -1840,7 +1606,6 @@
               <a:rPr lang="en-US" dirty="0"/>
               <a:t>The caveat matters: the bands sum to about 1.7 times the incident count, 2.1 in 2023, so the axis would overstate volume if we did not say so.</a:t>
             </a:r>
-            <a:endParaRPr lang="en-US" dirty="0"/>
           </a:p>
         </p:txBody>
       </p:sp>
@@ -1928,7 +1693,6 @@
               <a:rPr lang="en-US" dirty="0"/>
               <a:t>A difference of 22.7 points says nothing about whether it runs from 8 to 31 per cent or from 57 to 80. That is why both rates are on screen.</a:t>
             </a:r>
-            <a:endParaRPr lang="en-US" dirty="0"/>
           </a:p>
         </p:txBody>
       </p:sp>
@@ -2001,6 +1765,11 @@
 <file path=ppt/slideMasters/slideMaster1.xml><?xml version="1.0" encoding="utf-8"?>
 <p:sldMaster xmlns:a="http://schemas.openxmlformats.org/drawingml/2006/main" xmlns:r="http://schemas.openxmlformats.org/officeDocument/2006/relationships" xmlns:p="http://schemas.openxmlformats.org/presentationml/2006/main">
   <p:cSld>
+    <p:bg>
+      <p:bgRef idx="1001">
+        <a:schemeClr val="bg1"/>
+      </p:bgRef>
+    </p:bg>
     <p:spTree>
       <p:nvGrpSpPr>
         <p:cNvPr id="1" name=""/>
@@ -2283,6 +2052,7 @@
         <a:solidFill>
           <a:srgbClr val="3F3B78"/>
         </a:solidFill>
+        <a:effectLst/>
       </p:bgPr>
     </p:bg>
     <p:spTree>
@@ -2320,7 +2090,7 @@
           <a:bodyPr wrap="square" rtlCol="0" anchor="ctr"/>
           <a:lstStyle/>
           <a:p>
-            <a:pPr indent="0" marL="0">
+            <a:pPr marL="0" indent="0">
               <a:buNone/>
             </a:pPr>
             <a:r>
@@ -2359,7 +2129,7 @@
           <a:bodyPr wrap="square" rtlCol="0" anchor="ctr"/>
           <a:lstStyle/>
           <a:p>
-            <a:pPr indent="0" marL="0">
+            <a:pPr marL="0" indent="0">
               <a:buNone/>
             </a:pPr>
             <a:r>
@@ -2398,7 +2168,7 @@
           <a:bodyPr wrap="square" rtlCol="0" anchor="ctr"/>
           <a:lstStyle/>
           <a:p>
-            <a:pPr indent="0" marL="0">
+            <a:pPr marL="0" indent="0">
               <a:buNone/>
             </a:pPr>
             <a:r>
@@ -2437,7 +2207,7 @@
           <a:bodyPr wrap="square" rtlCol="0" anchor="ctr"/>
           <a:lstStyle/>
           <a:p>
-            <a:pPr indent="0" marL="0">
+            <a:pPr marL="0" indent="0">
               <a:buNone/>
             </a:pPr>
             <a:r>
@@ -2471,6 +2241,7 @@
         <a:solidFill>
           <a:srgbClr val="E9EBF2"/>
         </a:solidFill>
+        <a:effectLst/>
       </p:bgPr>
     </p:bg>
     <p:spTree>
@@ -2508,7 +2279,7 @@
           <a:bodyPr wrap="square" rtlCol="0" anchor="ctr"/>
           <a:lstStyle/>
           <a:p>
-            <a:pPr indent="0" marL="0">
+            <a:pPr marL="0" indent="0">
               <a:buNone/>
             </a:pPr>
             <a:r>
@@ -2547,13 +2318,20 @@
           </a:solidFill>
           <a:ln/>
           <a:effectLst>
-            <a:outerShdw sx="100000" sy="100000" kx="0" ky="0" algn="bl" rotWithShape="0" blurRad="76200" dist="12700" dir="5400000">
+            <a:outerShdw blurRad="76200" dist="12700" dir="5400000" algn="bl" rotWithShape="0">
               <a:srgbClr val="1F2330">
                 <a:alpha val="12000"/>
               </a:srgbClr>
             </a:outerShdw>
           </a:effectLst>
         </p:spPr>
+        <p:txBody>
+          <a:bodyPr/>
+          <a:lstStyle/>
+          <a:p>
+            <a:endParaRPr lang="it-IT"/>
+          </a:p>
+        </p:txBody>
       </p:sp>
       <p:sp>
         <p:nvSpPr>
@@ -2576,7 +2354,7 @@
           <a:bodyPr wrap="square" lIns="0" tIns="0" rIns="0" bIns="0" rtlCol="0" anchor="t"/>
           <a:lstStyle/>
           <a:p>
-            <a:pPr indent="0" marL="0">
+            <a:pPr marL="0" indent="0">
               <a:buNone/>
             </a:pPr>
             <a:r>
@@ -2615,7 +2393,7 @@
           <a:bodyPr wrap="square" lIns="0" tIns="0" rIns="0" bIns="0" rtlCol="0" anchor="t"/>
           <a:lstStyle/>
           <a:p>
-            <a:pPr indent="0" marL="0">
+            <a:pPr marL="0" indent="0">
               <a:buNone/>
             </a:pPr>
             <a:r>
@@ -2654,13 +2432,20 @@
           </a:solidFill>
           <a:ln/>
           <a:effectLst>
-            <a:outerShdw sx="100000" sy="100000" kx="0" ky="0" algn="bl" rotWithShape="0" blurRad="76200" dist="12700" dir="5400000">
+            <a:outerShdw blurRad="76200" dist="12700" dir="5400000" algn="bl" rotWithShape="0">
               <a:srgbClr val="1F2330">
                 <a:alpha val="12000"/>
               </a:srgbClr>
             </a:outerShdw>
           </a:effectLst>
         </p:spPr>
+        <p:txBody>
+          <a:bodyPr/>
+          <a:lstStyle/>
+          <a:p>
+            <a:endParaRPr lang="it-IT"/>
+          </a:p>
+        </p:txBody>
       </p:sp>
       <p:sp>
         <p:nvSpPr>
@@ -2683,7 +2468,7 @@
           <a:bodyPr wrap="square" lIns="0" tIns="0" rIns="0" bIns="0" rtlCol="0" anchor="t"/>
           <a:lstStyle/>
           <a:p>
-            <a:pPr indent="0" marL="0">
+            <a:pPr marL="0" indent="0">
               <a:buNone/>
             </a:pPr>
             <a:r>
@@ -2722,7 +2507,7 @@
           <a:bodyPr wrap="square" lIns="0" tIns="0" rIns="0" bIns="0" rtlCol="0" anchor="t"/>
           <a:lstStyle/>
           <a:p>
-            <a:pPr indent="0" marL="0">
+            <a:pPr marL="0" indent="0">
               <a:buNone/>
             </a:pPr>
             <a:r>
@@ -2761,13 +2546,20 @@
           </a:solidFill>
           <a:ln/>
           <a:effectLst>
-            <a:outerShdw sx="100000" sy="100000" kx="0" ky="0" algn="bl" rotWithShape="0" blurRad="76200" dist="12700" dir="5400000">
+            <a:outerShdw blurRad="76200" dist="12700" dir="5400000" algn="bl" rotWithShape="0">
               <a:srgbClr val="1F2330">
                 <a:alpha val="12000"/>
               </a:srgbClr>
             </a:outerShdw>
           </a:effectLst>
         </p:spPr>
+        <p:txBody>
+          <a:bodyPr/>
+          <a:lstStyle/>
+          <a:p>
+            <a:endParaRPr lang="it-IT"/>
+          </a:p>
+        </p:txBody>
       </p:sp>
       <p:sp>
         <p:nvSpPr>
@@ -2790,7 +2582,7 @@
           <a:bodyPr wrap="square" lIns="0" tIns="0" rIns="0" bIns="0" rtlCol="0" anchor="t"/>
           <a:lstStyle/>
           <a:p>
-            <a:pPr indent="0" marL="0">
+            <a:pPr marL="0" indent="0">
               <a:buNone/>
             </a:pPr>
             <a:r>
@@ -2829,7 +2621,7 @@
           <a:bodyPr wrap="square" lIns="0" tIns="0" rIns="0" bIns="0" rtlCol="0" anchor="t"/>
           <a:lstStyle/>
           <a:p>
-            <a:pPr indent="0" marL="0">
+            <a:pPr marL="0" indent="0">
               <a:buNone/>
             </a:pPr>
             <a:r>
@@ -2868,7 +2660,7 @@
           <a:bodyPr wrap="square" lIns="0" tIns="0" rIns="0" bIns="0" rtlCol="0" anchor="ctr"/>
           <a:lstStyle/>
           <a:p>
-            <a:pPr indent="0" marL="0">
+            <a:pPr marL="0" indent="0">
               <a:buNone/>
             </a:pPr>
             <a:r>
@@ -2902,6 +2694,7 @@
         <a:solidFill>
           <a:srgbClr val="E9EBF2"/>
         </a:solidFill>
+        <a:effectLst/>
       </p:bgPr>
     </p:bg>
     <p:spTree>
@@ -2939,7 +2732,7 @@
           <a:bodyPr wrap="square" rtlCol="0" anchor="ctr"/>
           <a:lstStyle/>
           <a:p>
-            <a:pPr indent="0" marL="0">
+            <a:pPr marL="0" indent="0">
               <a:buNone/>
             </a:pPr>
             <a:r>
@@ -2959,14 +2752,14 @@
       </p:sp>
       <p:pic>
         <p:nvPicPr>
-          <p:cNvPr id="3" name="Image 0" descr="C:\Users\samue\AppData\Local\Temp\claude\C--Users-samue-Documents-Universit--Magistrale-Visual-Analytics-threat-shape\5b1a0e67-32f2-4383-9f6b-aabc9bc776c8\scratchpad\deck\img\reprojection.png">    </p:cNvPr>
+          <p:cNvPr id="3" name="Image 0" descr="C:\Users\samue\AppData\Local\Temp\claude\C--Users-samue-Documents-Universit--Magistrale-Visual-Analytics-threat-shape\5b1a0e67-32f2-4383-9f6b-aabc9bc776c8\scratchpad\deck\img\reprojection.png"/>
           <p:cNvPicPr>
             <a:picLocks noChangeAspect="1"/>
           </p:cNvPicPr>
           <p:nvPr/>
         </p:nvPicPr>
         <p:blipFill>
-          <a:blip r:embed="rId1"/>
+          <a:blip r:embed="rId3"/>
           <a:stretch>
             <a:fillRect/>
           </a:stretch>
@@ -3002,7 +2795,7 @@
           <a:bodyPr wrap="square" lIns="0" tIns="0" rIns="0" bIns="0" rtlCol="0" anchor="ctr"/>
           <a:lstStyle/>
           <a:p>
-            <a:pPr indent="0" marL="0">
+            <a:pPr marL="0" indent="0">
               <a:buNone/>
             </a:pPr>
             <a:r>
@@ -3041,13 +2834,20 @@
           </a:solidFill>
           <a:ln/>
           <a:effectLst>
-            <a:outerShdw sx="100000" sy="100000" kx="0" ky="0" algn="bl" rotWithShape="0" blurRad="76200" dist="12700" dir="5400000">
+            <a:outerShdw blurRad="76200" dist="12700" dir="5400000" algn="bl" rotWithShape="0">
               <a:srgbClr val="1F2330">
                 <a:alpha val="12000"/>
               </a:srgbClr>
             </a:outerShdw>
           </a:effectLst>
         </p:spPr>
+        <p:txBody>
+          <a:bodyPr/>
+          <a:lstStyle/>
+          <a:p>
+            <a:endParaRPr lang="it-IT"/>
+          </a:p>
+        </p:txBody>
       </p:sp>
       <p:sp>
         <p:nvSpPr>
@@ -3150,6 +2950,7 @@
         <a:solidFill>
           <a:srgbClr val="E9EBF2"/>
         </a:solidFill>
+        <a:effectLst/>
       </p:bgPr>
     </p:bg>
     <p:spTree>
@@ -3187,7 +2988,7 @@
           <a:bodyPr wrap="square" rtlCol="0" anchor="ctr"/>
           <a:lstStyle/>
           <a:p>
-            <a:pPr indent="0" marL="0">
+            <a:pPr marL="0" indent="0">
               <a:buNone/>
             </a:pPr>
             <a:r>
@@ -3226,13 +3027,20 @@
           </a:solidFill>
           <a:ln/>
           <a:effectLst>
-            <a:outerShdw sx="100000" sy="100000" kx="0" ky="0" algn="bl" rotWithShape="0" blurRad="76200" dist="12700" dir="5400000">
+            <a:outerShdw blurRad="76200" dist="12700" dir="5400000" algn="bl" rotWithShape="0">
               <a:srgbClr val="1F2330">
                 <a:alpha val="12000"/>
               </a:srgbClr>
             </a:outerShdw>
           </a:effectLst>
         </p:spPr>
+        <p:txBody>
+          <a:bodyPr/>
+          <a:lstStyle/>
+          <a:p>
+            <a:endParaRPr lang="it-IT"/>
+          </a:p>
+        </p:txBody>
       </p:sp>
       <p:sp>
         <p:nvSpPr>
@@ -3255,7 +3063,7 @@
           <a:bodyPr wrap="square" lIns="0" tIns="0" rIns="0" bIns="0" rtlCol="0" anchor="t"/>
           <a:lstStyle/>
           <a:p>
-            <a:pPr indent="0" marL="0">
+            <a:pPr marL="0" indent="0">
               <a:buNone/>
             </a:pPr>
             <a:r>
@@ -3400,13 +3208,20 @@
           </a:solidFill>
           <a:ln/>
           <a:effectLst>
-            <a:outerShdw sx="100000" sy="100000" kx="0" ky="0" algn="bl" rotWithShape="0" blurRad="76200" dist="12700" dir="5400000">
+            <a:outerShdw blurRad="76200" dist="12700" dir="5400000" algn="bl" rotWithShape="0">
               <a:srgbClr val="1F2330">
                 <a:alpha val="12000"/>
               </a:srgbClr>
             </a:outerShdw>
           </a:effectLst>
         </p:spPr>
+        <p:txBody>
+          <a:bodyPr/>
+          <a:lstStyle/>
+          <a:p>
+            <a:endParaRPr lang="it-IT"/>
+          </a:p>
+        </p:txBody>
       </p:sp>
       <p:sp>
         <p:nvSpPr>
@@ -3429,7 +3244,7 @@
           <a:bodyPr wrap="square" lIns="0" tIns="0" rIns="0" bIns="0" rtlCol="0" anchor="t"/>
           <a:lstStyle/>
           <a:p>
-            <a:pPr indent="0" marL="0">
+            <a:pPr marL="0" indent="0">
               <a:buNone/>
             </a:pPr>
             <a:r>
@@ -3574,7 +3389,7 @@
           <a:bodyPr wrap="square" lIns="0" tIns="0" rIns="0" bIns="0" rtlCol="0" anchor="t"/>
           <a:lstStyle/>
           <a:p>
-            <a:pPr indent="0" marL="0">
+            <a:pPr marL="0" indent="0">
               <a:buNone/>
             </a:pPr>
             <a:r>
@@ -3608,6 +3423,7 @@
         <a:solidFill>
           <a:srgbClr val="E9EBF2"/>
         </a:solidFill>
+        <a:effectLst/>
       </p:bgPr>
     </p:bg>
     <p:spTree>
@@ -3645,7 +3461,7 @@
           <a:bodyPr wrap="square" rtlCol="0" anchor="ctr"/>
           <a:lstStyle/>
           <a:p>
-            <a:pPr indent="0" marL="0">
+            <a:pPr marL="0" indent="0">
               <a:buNone/>
             </a:pPr>
             <a:r>
@@ -3665,14 +3481,14 @@
       </p:sp>
       <p:pic>
         <p:nvPicPr>
-          <p:cNvPr id="3" name="Image 0" descr="C:\Users\samue\AppData\Local\Temp\claude\C--Users-samue-Documents-Universit--Magistrale-Visual-Analytics-threat-shape\5b1a0e67-32f2-4383-9f6b-aabc9bc776c8\scratchpad\deck\img\coding-break.png">    </p:cNvPr>
+          <p:cNvPr id="3" name="Image 0" descr="C:\Users\samue\AppData\Local\Temp\claude\C--Users-samue-Documents-Universit--Magistrale-Visual-Analytics-threat-shape\5b1a0e67-32f2-4383-9f6b-aabc9bc776c8\scratchpad\deck\img\coding-break.png"/>
           <p:cNvPicPr>
             <a:picLocks noChangeAspect="1"/>
           </p:cNvPicPr>
           <p:nvPr/>
         </p:nvPicPr>
         <p:blipFill>
-          <a:blip r:embed="rId1"/>
+          <a:blip r:embed="rId3"/>
           <a:stretch>
             <a:fillRect/>
           </a:stretch>
@@ -3708,7 +3524,7 @@
           <a:bodyPr wrap="square" lIns="0" tIns="0" rIns="0" bIns="0" rtlCol="0" anchor="ctr"/>
           <a:lstStyle/>
           <a:p>
-            <a:pPr indent="0" marL="0">
+            <a:pPr marL="0" indent="0">
               <a:buNone/>
             </a:pPr>
             <a:r>
@@ -3747,13 +3563,20 @@
           </a:solidFill>
           <a:ln/>
           <a:effectLst>
-            <a:outerShdw sx="100000" sy="100000" kx="0" ky="0" algn="bl" rotWithShape="0" blurRad="76200" dist="12700" dir="5400000">
+            <a:outerShdw blurRad="76200" dist="12700" dir="5400000" algn="bl" rotWithShape="0">
               <a:srgbClr val="1F2330">
                 <a:alpha val="12000"/>
               </a:srgbClr>
             </a:outerShdw>
           </a:effectLst>
         </p:spPr>
+        <p:txBody>
+          <a:bodyPr/>
+          <a:lstStyle/>
+          <a:p>
+            <a:endParaRPr lang="it-IT"/>
+          </a:p>
+        </p:txBody>
       </p:sp>
       <p:sp>
         <p:nvSpPr>
@@ -3856,6 +3679,7 @@
         <a:solidFill>
           <a:srgbClr val="E9EBF2"/>
         </a:solidFill>
+        <a:effectLst/>
       </p:bgPr>
     </p:bg>
     <p:spTree>
@@ -3893,7 +3717,7 @@
           <a:bodyPr wrap="square" rtlCol="0" anchor="ctr"/>
           <a:lstStyle/>
           <a:p>
-            <a:pPr indent="0" marL="0">
+            <a:pPr marL="0" indent="0">
               <a:buNone/>
             </a:pPr>
             <a:r>
@@ -3913,14 +3737,14 @@
       </p:sp>
       <p:pic>
         <p:nvPicPr>
-          <p:cNvPr id="3" name="Image 0" descr="C:\Users\samue\AppData\Local\Temp\claude\C--Users-samue-Documents-Universit--Magistrale-Visual-Analytics-threat-shape\5b1a0e67-32f2-4383-9f6b-aabc9bc776c8\scratchpad\deck\img\attribution-map.png">    </p:cNvPr>
+          <p:cNvPr id="3" name="Image 0" descr="C:\Users\samue\AppData\Local\Temp\claude\C--Users-samue-Documents-Universit--Magistrale-Visual-Analytics-threat-shape\5b1a0e67-32f2-4383-9f6b-aabc9bc776c8\scratchpad\deck\img\attribution-map.png"/>
           <p:cNvPicPr>
             <a:picLocks noChangeAspect="1"/>
           </p:cNvPicPr>
           <p:nvPr/>
         </p:nvPicPr>
         <p:blipFill>
-          <a:blip r:embed="rId1"/>
+          <a:blip r:embed="rId3"/>
           <a:stretch>
             <a:fillRect/>
           </a:stretch>
@@ -3956,7 +3780,7 @@
           <a:bodyPr wrap="square" lIns="0" tIns="0" rIns="0" bIns="0" rtlCol="0" anchor="ctr"/>
           <a:lstStyle/>
           <a:p>
-            <a:pPr indent="0" marL="0">
+            <a:pPr marL="0" indent="0">
               <a:buNone/>
             </a:pPr>
             <a:r>
@@ -3995,13 +3819,20 @@
           </a:solidFill>
           <a:ln/>
           <a:effectLst>
-            <a:outerShdw sx="100000" sy="100000" kx="0" ky="0" algn="bl" rotWithShape="0" blurRad="76200" dist="12700" dir="5400000">
+            <a:outerShdw blurRad="76200" dist="12700" dir="5400000" algn="bl" rotWithShape="0">
               <a:srgbClr val="1F2330">
                 <a:alpha val="12000"/>
               </a:srgbClr>
             </a:outerShdw>
           </a:effectLst>
         </p:spPr>
+        <p:txBody>
+          <a:bodyPr/>
+          <a:lstStyle/>
+          <a:p>
+            <a:endParaRPr lang="it-IT"/>
+          </a:p>
+        </p:txBody>
       </p:sp>
       <p:sp>
         <p:nvSpPr>
@@ -4104,6 +3935,7 @@
         <a:solidFill>
           <a:srgbClr val="E9EBF2"/>
         </a:solidFill>
+        <a:effectLst/>
       </p:bgPr>
     </p:bg>
     <p:spTree>
@@ -4141,7 +3973,7 @@
           <a:bodyPr wrap="square" rtlCol="0" anchor="ctr"/>
           <a:lstStyle/>
           <a:p>
-            <a:pPr indent="0" marL="0">
+            <a:pPr marL="0" indent="0">
               <a:buNone/>
             </a:pPr>
             <a:r>
@@ -4180,13 +4012,20 @@
           </a:solidFill>
           <a:ln/>
           <a:effectLst>
-            <a:outerShdw sx="100000" sy="100000" kx="0" ky="0" algn="bl" rotWithShape="0" blurRad="76200" dist="12700" dir="5400000">
+            <a:outerShdw blurRad="76200" dist="12700" dir="5400000" algn="bl" rotWithShape="0">
               <a:srgbClr val="1F2330">
                 <a:alpha val="12000"/>
               </a:srgbClr>
             </a:outerShdw>
           </a:effectLst>
         </p:spPr>
+        <p:txBody>
+          <a:bodyPr/>
+          <a:lstStyle/>
+          <a:p>
+            <a:endParaRPr lang="it-IT"/>
+          </a:p>
+        </p:txBody>
       </p:sp>
       <p:sp>
         <p:nvSpPr>
@@ -4209,7 +4048,7 @@
           <a:bodyPr wrap="square" lIns="0" tIns="0" rIns="0" bIns="0" rtlCol="0" anchor="t"/>
           <a:lstStyle/>
           <a:p>
-            <a:pPr indent="0" marL="0">
+            <a:pPr marL="0" indent="0">
               <a:buNone/>
             </a:pPr>
             <a:r>
@@ -4248,7 +4087,7 @@
           <a:bodyPr wrap="square" lIns="0" tIns="0" rIns="0" bIns="0" rtlCol="0" anchor="t"/>
           <a:lstStyle/>
           <a:p>
-            <a:pPr indent="0" marL="0">
+            <a:pPr marL="0" indent="0">
               <a:buNone/>
             </a:pPr>
             <a:r>
@@ -4287,7 +4126,7 @@
           <a:bodyPr wrap="square" lIns="0" tIns="0" rIns="0" bIns="0" rtlCol="0" anchor="t"/>
           <a:lstStyle/>
           <a:p>
-            <a:pPr indent="0" marL="0">
+            <a:pPr marL="0" indent="0">
               <a:buNone/>
             </a:pPr>
             <a:r>
@@ -4326,13 +4165,20 @@
           </a:solidFill>
           <a:ln/>
           <a:effectLst>
-            <a:outerShdw sx="100000" sy="100000" kx="0" ky="0" algn="bl" rotWithShape="0" blurRad="76200" dist="12700" dir="5400000">
+            <a:outerShdw blurRad="76200" dist="12700" dir="5400000" algn="bl" rotWithShape="0">
               <a:srgbClr val="1F2330">
                 <a:alpha val="12000"/>
               </a:srgbClr>
             </a:outerShdw>
           </a:effectLst>
         </p:spPr>
+        <p:txBody>
+          <a:bodyPr/>
+          <a:lstStyle/>
+          <a:p>
+            <a:endParaRPr lang="it-IT"/>
+          </a:p>
+        </p:txBody>
       </p:sp>
       <p:sp>
         <p:nvSpPr>
@@ -4355,7 +4201,7 @@
           <a:bodyPr wrap="square" lIns="0" tIns="0" rIns="0" bIns="0" rtlCol="0" anchor="t"/>
           <a:lstStyle/>
           <a:p>
-            <a:pPr indent="0" marL="0">
+            <a:pPr marL="0" indent="0">
               <a:buNone/>
             </a:pPr>
             <a:r>
@@ -4394,7 +4240,7 @@
           <a:bodyPr wrap="square" lIns="0" tIns="0" rIns="0" bIns="0" rtlCol="0" anchor="t"/>
           <a:lstStyle/>
           <a:p>
-            <a:pPr indent="0" marL="0">
+            <a:pPr marL="0" indent="0">
               <a:buNone/>
             </a:pPr>
             <a:r>
@@ -4433,7 +4279,7 @@
           <a:bodyPr wrap="square" lIns="0" tIns="0" rIns="0" bIns="0" rtlCol="0" anchor="t"/>
           <a:lstStyle/>
           <a:p>
-            <a:pPr indent="0" marL="0">
+            <a:pPr marL="0" indent="0">
               <a:buNone/>
             </a:pPr>
             <a:r>
@@ -4472,13 +4318,20 @@
           </a:solidFill>
           <a:ln/>
           <a:effectLst>
-            <a:outerShdw sx="100000" sy="100000" kx="0" ky="0" algn="bl" rotWithShape="0" blurRad="76200" dist="12700" dir="5400000">
+            <a:outerShdw blurRad="76200" dist="12700" dir="5400000" algn="bl" rotWithShape="0">
               <a:srgbClr val="1F2330">
                 <a:alpha val="12000"/>
               </a:srgbClr>
             </a:outerShdw>
           </a:effectLst>
         </p:spPr>
+        <p:txBody>
+          <a:bodyPr/>
+          <a:lstStyle/>
+          <a:p>
+            <a:endParaRPr lang="it-IT"/>
+          </a:p>
+        </p:txBody>
       </p:sp>
       <p:sp>
         <p:nvSpPr>
@@ -4501,7 +4354,7 @@
           <a:bodyPr wrap="square" lIns="0" tIns="0" rIns="0" bIns="0" rtlCol="0" anchor="t"/>
           <a:lstStyle/>
           <a:p>
-            <a:pPr indent="0" marL="0">
+            <a:pPr marL="0" indent="0">
               <a:buNone/>
             </a:pPr>
             <a:r>
@@ -4540,7 +4393,7 @@
           <a:bodyPr wrap="square" lIns="0" tIns="0" rIns="0" bIns="0" rtlCol="0" anchor="t"/>
           <a:lstStyle/>
           <a:p>
-            <a:pPr indent="0" marL="0">
+            <a:pPr marL="0" indent="0">
               <a:buNone/>
             </a:pPr>
             <a:r>
@@ -4579,7 +4432,7 @@
           <a:bodyPr wrap="square" lIns="0" tIns="0" rIns="0" bIns="0" rtlCol="0" anchor="t"/>
           <a:lstStyle/>
           <a:p>
-            <a:pPr indent="0" marL="0">
+            <a:pPr marL="0" indent="0">
               <a:buNone/>
             </a:pPr>
             <a:r>
@@ -4618,13 +4471,20 @@
           </a:solidFill>
           <a:ln/>
           <a:effectLst>
-            <a:outerShdw sx="100000" sy="100000" kx="0" ky="0" algn="bl" rotWithShape="0" blurRad="76200" dist="12700" dir="5400000">
+            <a:outerShdw blurRad="76200" dist="12700" dir="5400000" algn="bl" rotWithShape="0">
               <a:srgbClr val="1F2330">
                 <a:alpha val="12000"/>
               </a:srgbClr>
             </a:outerShdw>
           </a:effectLst>
         </p:spPr>
+        <p:txBody>
+          <a:bodyPr/>
+          <a:lstStyle/>
+          <a:p>
+            <a:endParaRPr lang="it-IT"/>
+          </a:p>
+        </p:txBody>
       </p:sp>
       <p:sp>
         <p:nvSpPr>
@@ -4647,7 +4507,7 @@
           <a:bodyPr wrap="square" lIns="0" tIns="0" rIns="0" bIns="0" rtlCol="0" anchor="t"/>
           <a:lstStyle/>
           <a:p>
-            <a:pPr indent="0" marL="0">
+            <a:pPr marL="0" indent="0">
               <a:buNone/>
             </a:pPr>
             <a:r>
@@ -4686,7 +4546,7 @@
           <a:bodyPr wrap="square" lIns="0" tIns="0" rIns="0" bIns="0" rtlCol="0" anchor="t"/>
           <a:lstStyle/>
           <a:p>
-            <a:pPr indent="0" marL="0">
+            <a:pPr marL="0" indent="0">
               <a:buNone/>
             </a:pPr>
             <a:r>
@@ -4725,7 +4585,7 @@
           <a:bodyPr wrap="square" lIns="0" tIns="0" rIns="0" bIns="0" rtlCol="0" anchor="t"/>
           <a:lstStyle/>
           <a:p>
-            <a:pPr indent="0" marL="0">
+            <a:pPr marL="0" indent="0">
               <a:buNone/>
             </a:pPr>
             <a:r>
@@ -4764,7 +4624,7 @@
           <a:bodyPr wrap="square" lIns="0" tIns="0" rIns="0" bIns="0" rtlCol="0" anchor="ctr"/>
           <a:lstStyle/>
           <a:p>
-            <a:pPr indent="0" marL="0">
+            <a:pPr marL="0" indent="0">
               <a:buNone/>
             </a:pPr>
             <a:r>
@@ -4798,6 +4658,7 @@
         <a:solidFill>
           <a:srgbClr val="E9EBF2"/>
         </a:solidFill>
+        <a:effectLst/>
       </p:bgPr>
     </p:bg>
     <p:spTree>
@@ -4835,7 +4696,7 @@
           <a:bodyPr wrap="square" rtlCol="0" anchor="ctr"/>
           <a:lstStyle/>
           <a:p>
-            <a:pPr indent="0" marL="0">
+            <a:pPr marL="0" indent="0">
               <a:buNone/>
             </a:pPr>
             <a:r>
@@ -4874,13 +4735,20 @@
           </a:solidFill>
           <a:ln/>
           <a:effectLst>
-            <a:outerShdw sx="100000" sy="100000" kx="0" ky="0" algn="bl" rotWithShape="0" blurRad="76200" dist="12700" dir="5400000">
+            <a:outerShdw blurRad="76200" dist="12700" dir="5400000" algn="bl" rotWithShape="0">
               <a:srgbClr val="1F2330">
                 <a:alpha val="12000"/>
               </a:srgbClr>
             </a:outerShdw>
           </a:effectLst>
         </p:spPr>
+        <p:txBody>
+          <a:bodyPr/>
+          <a:lstStyle/>
+          <a:p>
+            <a:endParaRPr lang="it-IT"/>
+          </a:p>
+        </p:txBody>
       </p:sp>
       <p:sp>
         <p:nvSpPr>
@@ -5004,6 +4872,7 @@
         <a:solidFill>
           <a:srgbClr val="3F3B78"/>
         </a:solidFill>
+        <a:effectLst/>
       </p:bgPr>
     </p:bg>
     <p:spTree>
@@ -5041,7 +4910,7 @@
           <a:bodyPr wrap="square" rtlCol="0" anchor="ctr"/>
           <a:lstStyle/>
           <a:p>
-            <a:pPr indent="0" marL="0">
+            <a:pPr marL="0" indent="0">
               <a:buNone/>
             </a:pPr>
             <a:r>
@@ -5186,7 +5055,7 @@
           <a:bodyPr wrap="square" rtlCol="0" anchor="ctr"/>
           <a:lstStyle/>
           <a:p>
-            <a:pPr indent="0" marL="0">
+            <a:pPr marL="0" indent="0">
               <a:buNone/>
             </a:pPr>
             <a:r>
@@ -5220,6 +5089,7 @@
         <a:solidFill>
           <a:srgbClr val="E9EBF2"/>
         </a:solidFill>
+        <a:effectLst/>
       </p:bgPr>
     </p:bg>
     <p:spTree>
@@ -5257,7 +5127,7 @@
           <a:bodyPr wrap="square" rtlCol="0" anchor="ctr"/>
           <a:lstStyle/>
           <a:p>
-            <a:pPr indent="0" marL="0">
+            <a:pPr marL="0" indent="0">
               <a:buNone/>
             </a:pPr>
             <a:r>
@@ -5296,13 +5166,20 @@
           </a:solidFill>
           <a:ln/>
           <a:effectLst>
-            <a:outerShdw sx="100000" sy="100000" kx="0" ky="0" algn="bl" rotWithShape="0" blurRad="76200" dist="12700" dir="5400000">
+            <a:outerShdw blurRad="76200" dist="12700" dir="5400000" algn="bl" rotWithShape="0">
               <a:srgbClr val="1F2330">
                 <a:alpha val="12000"/>
               </a:srgbClr>
             </a:outerShdw>
           </a:effectLst>
         </p:spPr>
+        <p:txBody>
+          <a:bodyPr/>
+          <a:lstStyle/>
+          <a:p>
+            <a:endParaRPr lang="it-IT"/>
+          </a:p>
+        </p:txBody>
       </p:sp>
       <p:sp>
         <p:nvSpPr>
@@ -5325,7 +5202,7 @@
           <a:bodyPr wrap="square" lIns="0" tIns="0" rIns="0" bIns="0" rtlCol="0" anchor="t"/>
           <a:lstStyle/>
           <a:p>
-            <a:pPr indent="0" marL="0">
+            <a:pPr marL="0" indent="0">
               <a:buNone/>
             </a:pPr>
             <a:r>
@@ -5449,7 +5326,7 @@
           <a:bodyPr wrap="square" lIns="0" tIns="0" rIns="0" bIns="0" rtlCol="0" anchor="ctr"/>
           <a:lstStyle/>
           <a:p>
-            <a:pPr indent="0" marL="0">
+            <a:pPr marL="0" indent="0">
               <a:buNone/>
             </a:pPr>
             <a:r>
@@ -5488,13 +5365,20 @@
           </a:solidFill>
           <a:ln/>
           <a:effectLst>
-            <a:outerShdw sx="100000" sy="100000" kx="0" ky="0" algn="bl" rotWithShape="0" blurRad="76200" dist="12700" dir="5400000">
+            <a:outerShdw blurRad="76200" dist="12700" dir="5400000" algn="bl" rotWithShape="0">
               <a:srgbClr val="1F2330">
                 <a:alpha val="12000"/>
               </a:srgbClr>
             </a:outerShdw>
           </a:effectLst>
         </p:spPr>
+        <p:txBody>
+          <a:bodyPr/>
+          <a:lstStyle/>
+          <a:p>
+            <a:endParaRPr lang="it-IT"/>
+          </a:p>
+        </p:txBody>
       </p:sp>
       <p:sp>
         <p:nvSpPr>
@@ -5517,7 +5401,7 @@
           <a:bodyPr wrap="square" lIns="0" tIns="0" rIns="0" bIns="0" rtlCol="0" anchor="t"/>
           <a:lstStyle/>
           <a:p>
-            <a:pPr indent="0" marL="0">
+            <a:pPr marL="0" indent="0">
               <a:buNone/>
             </a:pPr>
             <a:r>
@@ -5662,7 +5546,7 @@
           <a:bodyPr wrap="square" lIns="0" tIns="0" rIns="0" bIns="0" rtlCol="0" anchor="ctr"/>
           <a:lstStyle/>
           <a:p>
-            <a:pPr indent="0" marL="0">
+            <a:pPr marL="0" indent="0">
               <a:buNone/>
             </a:pPr>
             <a:r>
@@ -5701,7 +5585,7 @@
           <a:bodyPr wrap="square" lIns="0" tIns="0" rIns="0" bIns="0" rtlCol="0" anchor="ctr"/>
           <a:lstStyle/>
           <a:p>
-            <a:pPr indent="0" marL="0">
+            <a:pPr marL="0" indent="0">
               <a:buNone/>
             </a:pPr>
             <a:r>
@@ -5735,6 +5619,7 @@
         <a:solidFill>
           <a:srgbClr val="E9EBF2"/>
         </a:solidFill>
+        <a:effectLst/>
       </p:bgPr>
     </p:bg>
     <p:spTree>
@@ -5772,7 +5657,7 @@
           <a:bodyPr wrap="square" rtlCol="0" anchor="ctr"/>
           <a:lstStyle/>
           <a:p>
-            <a:pPr indent="0" marL="0">
+            <a:pPr marL="0" indent="0">
               <a:buNone/>
             </a:pPr>
             <a:r>
@@ -5811,13 +5696,20 @@
           </a:solidFill>
           <a:ln/>
           <a:effectLst>
-            <a:outerShdw sx="100000" sy="100000" kx="0" ky="0" algn="bl" rotWithShape="0" blurRad="76200" dist="12700" dir="5400000">
+            <a:outerShdw blurRad="76200" dist="12700" dir="5400000" algn="bl" rotWithShape="0">
               <a:srgbClr val="1F2330">
                 <a:alpha val="12000"/>
               </a:srgbClr>
             </a:outerShdw>
           </a:effectLst>
         </p:spPr>
+        <p:txBody>
+          <a:bodyPr/>
+          <a:lstStyle/>
+          <a:p>
+            <a:endParaRPr lang="it-IT"/>
+          </a:p>
+        </p:txBody>
       </p:sp>
       <p:sp>
         <p:nvSpPr>
@@ -5840,7 +5732,7 @@
           <a:bodyPr wrap="square" lIns="0" tIns="0" rIns="0" bIns="0" rtlCol="0" anchor="t"/>
           <a:lstStyle/>
           <a:p>
-            <a:pPr indent="0" marL="0">
+            <a:pPr marL="0" indent="0">
               <a:buNone/>
             </a:pPr>
             <a:r>
@@ -5879,7 +5771,7 @@
           <a:bodyPr wrap="square" lIns="0" tIns="0" rIns="0" bIns="0" rtlCol="0" anchor="t"/>
           <a:lstStyle/>
           <a:p>
-            <a:pPr indent="0" marL="0">
+            <a:pPr marL="0" indent="0">
               <a:buNone/>
             </a:pPr>
             <a:r>
@@ -5918,13 +5810,20 @@
           </a:solidFill>
           <a:ln/>
           <a:effectLst>
-            <a:outerShdw sx="100000" sy="100000" kx="0" ky="0" algn="bl" rotWithShape="0" blurRad="76200" dist="12700" dir="5400000">
+            <a:outerShdw blurRad="76200" dist="12700" dir="5400000" algn="bl" rotWithShape="0">
               <a:srgbClr val="1F2330">
                 <a:alpha val="12000"/>
               </a:srgbClr>
             </a:outerShdw>
           </a:effectLst>
         </p:spPr>
+        <p:txBody>
+          <a:bodyPr/>
+          <a:lstStyle/>
+          <a:p>
+            <a:endParaRPr lang="it-IT"/>
+          </a:p>
+        </p:txBody>
       </p:sp>
       <p:sp>
         <p:nvSpPr>
@@ -5947,7 +5846,7 @@
           <a:bodyPr wrap="square" lIns="0" tIns="0" rIns="0" bIns="0" rtlCol="0" anchor="t"/>
           <a:lstStyle/>
           <a:p>
-            <a:pPr indent="0" marL="0">
+            <a:pPr marL="0" indent="0">
               <a:buNone/>
             </a:pPr>
             <a:r>
@@ -5986,7 +5885,7 @@
           <a:bodyPr wrap="square" lIns="0" tIns="0" rIns="0" bIns="0" rtlCol="0" anchor="t"/>
           <a:lstStyle/>
           <a:p>
-            <a:pPr indent="0" marL="0">
+            <a:pPr marL="0" indent="0">
               <a:buNone/>
             </a:pPr>
             <a:r>
@@ -6025,13 +5924,20 @@
           </a:solidFill>
           <a:ln/>
           <a:effectLst>
-            <a:outerShdw sx="100000" sy="100000" kx="0" ky="0" algn="bl" rotWithShape="0" blurRad="76200" dist="12700" dir="5400000">
+            <a:outerShdw blurRad="76200" dist="12700" dir="5400000" algn="bl" rotWithShape="0">
               <a:srgbClr val="1F2330">
                 <a:alpha val="12000"/>
               </a:srgbClr>
             </a:outerShdw>
           </a:effectLst>
         </p:spPr>
+        <p:txBody>
+          <a:bodyPr/>
+          <a:lstStyle/>
+          <a:p>
+            <a:endParaRPr lang="it-IT"/>
+          </a:p>
+        </p:txBody>
       </p:sp>
       <p:sp>
         <p:nvSpPr>
@@ -6054,7 +5960,7 @@
           <a:bodyPr wrap="square" lIns="0" tIns="0" rIns="0" bIns="0" rtlCol="0" anchor="t"/>
           <a:lstStyle/>
           <a:p>
-            <a:pPr indent="0" marL="0">
+            <a:pPr marL="0" indent="0">
               <a:buNone/>
             </a:pPr>
             <a:r>
@@ -6093,7 +5999,7 @@
           <a:bodyPr wrap="square" lIns="0" tIns="0" rIns="0" bIns="0" rtlCol="0" anchor="t"/>
           <a:lstStyle/>
           <a:p>
-            <a:pPr indent="0" marL="0">
+            <a:pPr marL="0" indent="0">
               <a:buNone/>
             </a:pPr>
             <a:r>
@@ -6120,7 +6026,7 @@
         <p:spPr>
           <a:xfrm>
             <a:off x="457200" y="2468880"/>
-            <a:ext cx="8229600" cy="1691640"/>
+            <a:ext cx="8229600" cy="1980290"/>
           </a:xfrm>
           <a:prstGeom prst="roundRect">
             <a:avLst>
@@ -6132,13 +6038,20 @@
           </a:solidFill>
           <a:ln/>
           <a:effectLst>
-            <a:outerShdw sx="100000" sy="100000" kx="0" ky="0" algn="bl" rotWithShape="0" blurRad="76200" dist="12700" dir="5400000">
+            <a:outerShdw blurRad="76200" dist="12700" dir="5400000" algn="bl" rotWithShape="0">
               <a:srgbClr val="1F2330">
                 <a:alpha val="12000"/>
               </a:srgbClr>
             </a:outerShdw>
           </a:effectLst>
         </p:spPr>
+        <p:txBody>
+          <a:bodyPr/>
+          <a:lstStyle/>
+          <a:p>
+            <a:endParaRPr lang="it-IT"/>
+          </a:p>
+        </p:txBody>
       </p:sp>
       <p:sp>
         <p:nvSpPr>
@@ -6161,7 +6074,7 @@
           <a:bodyPr wrap="square" lIns="0" tIns="0" rIns="0" bIns="0" rtlCol="0" anchor="ctr"/>
           <a:lstStyle/>
           <a:p>
-            <a:pPr indent="0" marL="0">
+            <a:pPr marL="0" indent="0">
               <a:buNone/>
             </a:pPr>
             <a:r>
@@ -6280,6 +6193,7 @@
         <a:solidFill>
           <a:srgbClr val="E9EBF2"/>
         </a:solidFill>
+        <a:effectLst/>
       </p:bgPr>
     </p:bg>
     <p:spTree>
@@ -6317,7 +6231,7 @@
           <a:bodyPr wrap="square" rtlCol="0" anchor="ctr"/>
           <a:lstStyle/>
           <a:p>
-            <a:pPr indent="0" marL="0">
+            <a:pPr marL="0" indent="0">
               <a:buNone/>
             </a:pPr>
             <a:r>
@@ -6356,13 +6270,20 @@
           </a:solidFill>
           <a:ln/>
           <a:effectLst>
-            <a:outerShdw sx="100000" sy="100000" kx="0" ky="0" algn="bl" rotWithShape="0" blurRad="76200" dist="12700" dir="5400000">
+            <a:outerShdw blurRad="76200" dist="12700" dir="5400000" algn="bl" rotWithShape="0">
               <a:srgbClr val="1F2330">
                 <a:alpha val="12000"/>
               </a:srgbClr>
             </a:outerShdw>
           </a:effectLst>
         </p:spPr>
+        <p:txBody>
+          <a:bodyPr/>
+          <a:lstStyle/>
+          <a:p>
+            <a:endParaRPr lang="it-IT"/>
+          </a:p>
+        </p:txBody>
       </p:sp>
       <p:sp>
         <p:nvSpPr>
@@ -6385,7 +6306,7 @@
           <a:bodyPr wrap="square" lIns="0" tIns="0" rIns="0" bIns="0" rtlCol="0" anchor="t"/>
           <a:lstStyle/>
           <a:p>
-            <a:pPr indent="0" marL="0">
+            <a:pPr marL="0" indent="0">
               <a:buNone/>
             </a:pPr>
             <a:r>
@@ -6424,7 +6345,7 @@
           <a:bodyPr wrap="square" lIns="0" tIns="0" rIns="0" bIns="0" rtlCol="0" anchor="t"/>
           <a:lstStyle/>
           <a:p>
-            <a:pPr indent="0" marL="0">
+            <a:pPr marL="0" indent="0">
               <a:buNone/>
             </a:pPr>
             <a:r>
@@ -6441,7 +6362,7 @@
             <a:endParaRPr lang="en-US" sz="1200" dirty="0"/>
           </a:p>
           <a:p>
-            <a:pPr indent="0" marL="0">
+            <a:pPr marL="0" indent="0">
               <a:buNone/>
             </a:pPr>
             <a:r>
@@ -6480,7 +6401,7 @@
           <a:bodyPr wrap="square" lIns="0" tIns="0" rIns="0" bIns="0" rtlCol="0" anchor="ctr"/>
           <a:lstStyle/>
           <a:p>
-            <a:pPr algn="ctr" indent="0" marL="0">
+            <a:pPr marL="0" indent="0" algn="ctr">
               <a:buNone/>
             </a:pPr>
             <a:r>
@@ -6519,13 +6440,20 @@
           </a:solidFill>
           <a:ln/>
           <a:effectLst>
-            <a:outerShdw sx="100000" sy="100000" kx="0" ky="0" algn="bl" rotWithShape="0" blurRad="76200" dist="12700" dir="5400000">
+            <a:outerShdw blurRad="76200" dist="12700" dir="5400000" algn="bl" rotWithShape="0">
               <a:srgbClr val="1F2330">
                 <a:alpha val="12000"/>
               </a:srgbClr>
             </a:outerShdw>
           </a:effectLst>
         </p:spPr>
+        <p:txBody>
+          <a:bodyPr/>
+          <a:lstStyle/>
+          <a:p>
+            <a:endParaRPr lang="it-IT"/>
+          </a:p>
+        </p:txBody>
       </p:sp>
       <p:sp>
         <p:nvSpPr>
@@ -6548,7 +6476,7 @@
           <a:bodyPr wrap="square" lIns="0" tIns="0" rIns="0" bIns="0" rtlCol="0" anchor="t"/>
           <a:lstStyle/>
           <a:p>
-            <a:pPr indent="0" marL="0">
+            <a:pPr marL="0" indent="0">
               <a:buNone/>
             </a:pPr>
             <a:r>
@@ -6587,7 +6515,7 @@
           <a:bodyPr wrap="square" lIns="0" tIns="0" rIns="0" bIns="0" rtlCol="0" anchor="t"/>
           <a:lstStyle/>
           <a:p>
-            <a:pPr indent="0" marL="0">
+            <a:pPr marL="0" indent="0">
               <a:buNone/>
             </a:pPr>
             <a:r>
@@ -6604,7 +6532,7 @@
             <a:endParaRPr lang="en-US" sz="1200" dirty="0"/>
           </a:p>
           <a:p>
-            <a:pPr indent="0" marL="0">
+            <a:pPr marL="0" indent="0">
               <a:buNone/>
             </a:pPr>
             <a:r>
@@ -6643,7 +6571,7 @@
           <a:bodyPr wrap="square" lIns="0" tIns="0" rIns="0" bIns="0" rtlCol="0" anchor="ctr"/>
           <a:lstStyle/>
           <a:p>
-            <a:pPr algn="ctr" indent="0" marL="0">
+            <a:pPr marL="0" indent="0" algn="ctr">
               <a:buNone/>
             </a:pPr>
             <a:r>
@@ -6682,13 +6610,20 @@
           </a:solidFill>
           <a:ln/>
           <a:effectLst>
-            <a:outerShdw sx="100000" sy="100000" kx="0" ky="0" algn="bl" rotWithShape="0" blurRad="76200" dist="12700" dir="5400000">
+            <a:outerShdw blurRad="76200" dist="12700" dir="5400000" algn="bl" rotWithShape="0">
               <a:srgbClr val="1F2330">
                 <a:alpha val="12000"/>
               </a:srgbClr>
             </a:outerShdw>
           </a:effectLst>
         </p:spPr>
+        <p:txBody>
+          <a:bodyPr/>
+          <a:lstStyle/>
+          <a:p>
+            <a:endParaRPr lang="it-IT"/>
+          </a:p>
+        </p:txBody>
       </p:sp>
       <p:sp>
         <p:nvSpPr>
@@ -6711,7 +6646,7 @@
           <a:bodyPr wrap="square" lIns="0" tIns="0" rIns="0" bIns="0" rtlCol="0" anchor="t"/>
           <a:lstStyle/>
           <a:p>
-            <a:pPr indent="0" marL="0">
+            <a:pPr marL="0" indent="0">
               <a:buNone/>
             </a:pPr>
             <a:r>
@@ -6750,7 +6685,7 @@
           <a:bodyPr wrap="square" lIns="0" tIns="0" rIns="0" bIns="0" rtlCol="0" anchor="t"/>
           <a:lstStyle/>
           <a:p>
-            <a:pPr indent="0" marL="0">
+            <a:pPr marL="0" indent="0">
               <a:buNone/>
             </a:pPr>
             <a:r>
@@ -6767,7 +6702,7 @@
             <a:endParaRPr lang="en-US" sz="1200" dirty="0"/>
           </a:p>
           <a:p>
-            <a:pPr indent="0" marL="0">
+            <a:pPr marL="0" indent="0">
               <a:buNone/>
             </a:pPr>
             <a:r>
@@ -6806,13 +6741,20 @@
           </a:solidFill>
           <a:ln/>
           <a:effectLst>
-            <a:outerShdw sx="100000" sy="100000" kx="0" ky="0" algn="bl" rotWithShape="0" blurRad="76200" dist="12700" dir="5400000">
+            <a:outerShdw blurRad="76200" dist="12700" dir="5400000" algn="bl" rotWithShape="0">
               <a:srgbClr val="1F2330">
                 <a:alpha val="12000"/>
               </a:srgbClr>
             </a:outerShdw>
           </a:effectLst>
         </p:spPr>
+        <p:txBody>
+          <a:bodyPr/>
+          <a:lstStyle/>
+          <a:p>
+            <a:endParaRPr lang="it-IT"/>
+          </a:p>
+        </p:txBody>
       </p:sp>
       <p:sp>
         <p:nvSpPr>
@@ -6894,6 +6836,7 @@
         <a:solidFill>
           <a:srgbClr val="E9EBF2"/>
         </a:solidFill>
+        <a:effectLst/>
       </p:bgPr>
     </p:bg>
     <p:spTree>
@@ -6931,7 +6874,7 @@
           <a:bodyPr wrap="square" rtlCol="0" anchor="ctr"/>
           <a:lstStyle/>
           <a:p>
-            <a:pPr indent="0" marL="0">
+            <a:pPr marL="0" indent="0">
               <a:buNone/>
             </a:pPr>
             <a:r>
@@ -6951,14 +6894,14 @@
       </p:sp>
       <p:pic>
         <p:nvPicPr>
-          <p:cNvPr id="3" name="Image 0" descr="C:\Users\samue\AppData\Local\Temp\claude\C--Users-samue-Documents-Universit--Magistrale-Visual-Analytics-threat-shape\5b1a0e67-32f2-4383-9f6b-aabc9bc776c8\scratchpad\deck\img\dashboard.png">    </p:cNvPr>
+          <p:cNvPr id="3" name="Image 0" descr="C:\Users\samue\AppData\Local\Temp\claude\C--Users-samue-Documents-Universit--Magistrale-Visual-Analytics-threat-shape\5b1a0e67-32f2-4383-9f6b-aabc9bc776c8\scratchpad\deck\img\dashboard.png"/>
           <p:cNvPicPr>
             <a:picLocks noChangeAspect="1"/>
           </p:cNvPicPr>
           <p:nvPr/>
         </p:nvPicPr>
         <p:blipFill>
-          <a:blip r:embed="rId1"/>
+          <a:blip r:embed="rId3"/>
           <a:stretch>
             <a:fillRect/>
           </a:stretch>
@@ -6989,6 +6932,7 @@
         <a:solidFill>
           <a:srgbClr val="E9EBF2"/>
         </a:solidFill>
+        <a:effectLst/>
       </p:bgPr>
     </p:bg>
     <p:spTree>
@@ -7026,7 +6970,7 @@
           <a:bodyPr wrap="square" rtlCol="0" anchor="ctr"/>
           <a:lstStyle/>
           <a:p>
-            <a:pPr indent="0" marL="0">
+            <a:pPr marL="0" indent="0">
               <a:buNone/>
             </a:pPr>
             <a:r>
@@ -7046,14 +6990,14 @@
       </p:sp>
       <p:pic>
         <p:nvPicPr>
-          <p:cNvPr id="3" name="Image 0" descr="C:\Users\samue\AppData\Local\Temp\claude\C--Users-samue-Documents-Universit--Magistrale-Visual-Analytics-threat-shape\5b1a0e67-32f2-4383-9f6b-aabc9bc776c8\scratchpad\deck\img\view-a-map.png">    </p:cNvPr>
+          <p:cNvPr id="3" name="Image 0" descr="C:\Users\samue\AppData\Local\Temp\claude\C--Users-samue-Documents-Universit--Magistrale-Visual-Analytics-threat-shape\5b1a0e67-32f2-4383-9f6b-aabc9bc776c8\scratchpad\deck\img\view-a-map.png"/>
           <p:cNvPicPr>
             <a:picLocks noChangeAspect="1"/>
           </p:cNvPicPr>
           <p:nvPr/>
         </p:nvPicPr>
         <p:blipFill>
-          <a:blip r:embed="rId1"/>
+          <a:blip r:embed="rId3"/>
           <a:stretch>
             <a:fillRect/>
           </a:stretch>
@@ -7089,7 +7033,7 @@
           <a:bodyPr wrap="square" lIns="0" tIns="0" rIns="0" bIns="0" rtlCol="0" anchor="ctr"/>
           <a:lstStyle/>
           <a:p>
-            <a:pPr indent="0" marL="0">
+            <a:pPr marL="0" indent="0">
               <a:buNone/>
             </a:pPr>
             <a:r>
@@ -7128,13 +7072,20 @@
           </a:solidFill>
           <a:ln/>
           <a:effectLst>
-            <a:outerShdw sx="100000" sy="100000" kx="0" ky="0" algn="bl" rotWithShape="0" blurRad="76200" dist="12700" dir="5400000">
+            <a:outerShdw blurRad="76200" dist="12700" dir="5400000" algn="bl" rotWithShape="0">
               <a:srgbClr val="1F2330">
                 <a:alpha val="12000"/>
               </a:srgbClr>
             </a:outerShdw>
           </a:effectLst>
         </p:spPr>
+        <p:txBody>
+          <a:bodyPr/>
+          <a:lstStyle/>
+          <a:p>
+            <a:endParaRPr lang="it-IT"/>
+          </a:p>
+        </p:txBody>
       </p:sp>
       <p:sp>
         <p:nvSpPr>
@@ -7237,6 +7188,7 @@
         <a:solidFill>
           <a:srgbClr val="E9EBF2"/>
         </a:solidFill>
+        <a:effectLst/>
       </p:bgPr>
     </p:bg>
     <p:spTree>
@@ -7274,7 +7226,7 @@
           <a:bodyPr wrap="square" rtlCol="0" anchor="ctr"/>
           <a:lstStyle/>
           <a:p>
-            <a:pPr indent="0" marL="0">
+            <a:pPr marL="0" indent="0">
               <a:buNone/>
             </a:pPr>
             <a:r>
@@ -7294,14 +7246,14 @@
       </p:sp>
       <p:pic>
         <p:nvPicPr>
-          <p:cNvPr id="3" name="Image 0" descr="C:\Users\samue\AppData\Local\Temp\claude\C--Users-samue-Documents-Universit--Magistrale-Visual-Analytics-threat-shape\5b1a0e67-32f2-4383-9f6b-aabc9bc776c8\scratchpad\deck\img\view-b-tsne.png">    </p:cNvPr>
+          <p:cNvPr id="3" name="Image 0" descr="C:\Users\samue\AppData\Local\Temp\claude\C--Users-samue-Documents-Universit--Magistrale-Visual-Analytics-threat-shape\5b1a0e67-32f2-4383-9f6b-aabc9bc776c8\scratchpad\deck\img\view-b-tsne.png"/>
           <p:cNvPicPr>
             <a:picLocks noChangeAspect="1"/>
           </p:cNvPicPr>
           <p:nvPr/>
         </p:nvPicPr>
         <p:blipFill>
-          <a:blip r:embed="rId1"/>
+          <a:blip r:embed="rId3"/>
           <a:stretch>
             <a:fillRect/>
           </a:stretch>
@@ -7337,7 +7289,7 @@
           <a:bodyPr wrap="square" lIns="0" tIns="0" rIns="0" bIns="0" rtlCol="0" anchor="ctr"/>
           <a:lstStyle/>
           <a:p>
-            <a:pPr indent="0" marL="0">
+            <a:pPr marL="0" indent="0">
               <a:buNone/>
             </a:pPr>
             <a:r>
@@ -7376,13 +7328,20 @@
           </a:solidFill>
           <a:ln/>
           <a:effectLst>
-            <a:outerShdw sx="100000" sy="100000" kx="0" ky="0" algn="bl" rotWithShape="0" blurRad="76200" dist="12700" dir="5400000">
+            <a:outerShdw blurRad="76200" dist="12700" dir="5400000" algn="bl" rotWithShape="0">
               <a:srgbClr val="1F2330">
                 <a:alpha val="12000"/>
               </a:srgbClr>
             </a:outerShdw>
           </a:effectLst>
         </p:spPr>
+        <p:txBody>
+          <a:bodyPr/>
+          <a:lstStyle/>
+          <a:p>
+            <a:endParaRPr lang="it-IT"/>
+          </a:p>
+        </p:txBody>
       </p:sp>
       <p:sp>
         <p:nvSpPr>
@@ -7485,6 +7444,7 @@
         <a:solidFill>
           <a:srgbClr val="E9EBF2"/>
         </a:solidFill>
+        <a:effectLst/>
       </p:bgPr>
     </p:bg>
     <p:spTree>
@@ -7522,7 +7482,7 @@
           <a:bodyPr wrap="square" rtlCol="0" anchor="ctr"/>
           <a:lstStyle/>
           <a:p>
-            <a:pPr indent="0" marL="0">
+            <a:pPr marL="0" indent="0">
               <a:buNone/>
             </a:pPr>
             <a:r>
@@ -7542,14 +7502,14 @@
       </p:sp>
       <p:pic>
         <p:nvPicPr>
-          <p:cNvPr id="3" name="Image 0" descr="C:\Users\samue\AppData\Local\Temp\claude\C--Users-samue-Documents-Universit--Magistrale-Visual-Analytics-threat-shape\5b1a0e67-32f2-4383-9f6b-aabc9bc776c8\scratchpad\deck\img\view-c-timeline.png">    </p:cNvPr>
+          <p:cNvPr id="3" name="Image 0" descr="C:\Users\samue\AppData\Local\Temp\claude\C--Users-samue-Documents-Universit--Magistrale-Visual-Analytics-threat-shape\5b1a0e67-32f2-4383-9f6b-aabc9bc776c8\scratchpad\deck\img\view-c-timeline.png"/>
           <p:cNvPicPr>
             <a:picLocks noChangeAspect="1"/>
           </p:cNvPicPr>
           <p:nvPr/>
         </p:nvPicPr>
         <p:blipFill>
-          <a:blip r:embed="rId1"/>
+          <a:blip r:embed="rId3"/>
           <a:stretch>
             <a:fillRect/>
           </a:stretch>
@@ -7585,7 +7545,7 @@
           <a:bodyPr wrap="square" lIns="0" tIns="0" rIns="0" bIns="0" rtlCol="0" anchor="ctr"/>
           <a:lstStyle/>
           <a:p>
-            <a:pPr indent="0" marL="0">
+            <a:pPr marL="0" indent="0">
               <a:buNone/>
             </a:pPr>
             <a:r>
@@ -7624,13 +7584,20 @@
           </a:solidFill>
           <a:ln/>
           <a:effectLst>
-            <a:outerShdw sx="100000" sy="100000" kx="0" ky="0" algn="bl" rotWithShape="0" blurRad="76200" dist="12700" dir="5400000">
+            <a:outerShdw blurRad="76200" dist="12700" dir="5400000" algn="bl" rotWithShape="0">
               <a:srgbClr val="1F2330">
                 <a:alpha val="12000"/>
               </a:srgbClr>
             </a:outerShdw>
           </a:effectLst>
         </p:spPr>
+        <p:txBody>
+          <a:bodyPr/>
+          <a:lstStyle/>
+          <a:p>
+            <a:endParaRPr lang="it-IT"/>
+          </a:p>
+        </p:txBody>
       </p:sp>
       <p:sp>
         <p:nvSpPr>
@@ -7733,6 +7700,7 @@
         <a:solidFill>
           <a:srgbClr val="E9EBF2"/>
         </a:solidFill>
+        <a:effectLst/>
       </p:bgPr>
     </p:bg>
     <p:spTree>
@@ -7770,7 +7738,7 @@
           <a:bodyPr wrap="square" rtlCol="0" anchor="ctr"/>
           <a:lstStyle/>
           <a:p>
-            <a:pPr indent="0" marL="0">
+            <a:pPr marL="0" indent="0">
               <a:buNone/>
             </a:pPr>
             <a:r>
@@ -7790,14 +7758,14 @@
       </p:sp>
       <p:pic>
         <p:nvPicPr>
-          <p:cNvPr id="3" name="Image 0" descr="C:\Users\samue\AppData\Local\Temp\claude\C--Users-samue-Documents-Universit--Magistrale-Visual-Analytics-threat-shape\5b1a0e67-32f2-4383-9f6b-aabc9bc776c8\scratchpad\deck\img\view-d-contrast.png">    </p:cNvPr>
+          <p:cNvPr id="3" name="Image 0" descr="C:\Users\samue\AppData\Local\Temp\claude\C--Users-samue-Documents-Universit--Magistrale-Visual-Analytics-threat-shape\5b1a0e67-32f2-4383-9f6b-aabc9bc776c8\scratchpad\deck\img\view-d-contrast.png"/>
           <p:cNvPicPr>
             <a:picLocks noChangeAspect="1"/>
           </p:cNvPicPr>
           <p:nvPr/>
         </p:nvPicPr>
         <p:blipFill>
-          <a:blip r:embed="rId1"/>
+          <a:blip r:embed="rId3"/>
           <a:stretch>
             <a:fillRect/>
           </a:stretch>
@@ -7833,7 +7801,7 @@
           <a:bodyPr wrap="square" lIns="0" tIns="0" rIns="0" bIns="0" rtlCol="0" anchor="ctr"/>
           <a:lstStyle/>
           <a:p>
-            <a:pPr indent="0" marL="0">
+            <a:pPr marL="0" indent="0">
               <a:buNone/>
             </a:pPr>
             <a:r>
@@ -7872,13 +7840,20 @@
           </a:solidFill>
           <a:ln/>
           <a:effectLst>
-            <a:outerShdw sx="100000" sy="100000" kx="0" ky="0" algn="bl" rotWithShape="0" blurRad="76200" dist="12700" dir="5400000">
+            <a:outerShdw blurRad="76200" dist="12700" dir="5400000" algn="bl" rotWithShape="0">
               <a:srgbClr val="1F2330">
                 <a:alpha val="12000"/>
               </a:srgbClr>
             </a:outerShdw>
           </a:effectLst>
         </p:spPr>
+        <p:txBody>
+          <a:bodyPr/>
+          <a:lstStyle/>
+          <a:p>
+            <a:endParaRPr lang="it-IT"/>
+          </a:p>
+        </p:txBody>
       </p:sp>
       <p:sp>
         <p:nvSpPr>
@@ -8266,4 +8241,319 @@
     </a:ext>
   </a:extLst>
 </a:theme>
+</file>
+
+<file path=ppt/theme/theme2.xml><?xml version="1.0" encoding="utf-8"?>
+<a:theme xmlns:a="http://schemas.openxmlformats.org/drawingml/2006/main" name="Tema di Office">
+  <a:themeElements>
+    <a:clrScheme name="Office">
+      <a:dk1>
+        <a:sysClr val="windowText" lastClr="000000"/>
+      </a:dk1>
+      <a:lt1>
+        <a:sysClr val="window" lastClr="FFFFFF"/>
+      </a:lt1>
+      <a:dk2>
+        <a:srgbClr val="0E2841"/>
+      </a:dk2>
+      <a:lt2>
+        <a:srgbClr val="E8E8E8"/>
+      </a:lt2>
+      <a:accent1>
+        <a:srgbClr val="156082"/>
+      </a:accent1>
+      <a:accent2>
+        <a:srgbClr val="E97132"/>
+      </a:accent2>
+      <a:accent3>
+        <a:srgbClr val="196B24"/>
+      </a:accent3>
+      <a:accent4>
+        <a:srgbClr val="0F9ED5"/>
+      </a:accent4>
+      <a:accent5>
+        <a:srgbClr val="A02B93"/>
+      </a:accent5>
+      <a:accent6>
+        <a:srgbClr val="4EA72E"/>
+      </a:accent6>
+      <a:hlink>
+        <a:srgbClr val="467886"/>
+      </a:hlink>
+      <a:folHlink>
+        <a:srgbClr val="96607D"/>
+      </a:folHlink>
+    </a:clrScheme>
+    <a:fontScheme name="Office">
+      <a:majorFont>
+        <a:latin typeface="Aptos Display" panose="02110004020202020204"/>
+        <a:ea typeface=""/>
+        <a:cs typeface=""/>
+        <a:font script="Jpan" typeface="游ゴシック Light"/>
+        <a:font script="Hang" typeface="맑은 고딕"/>
+        <a:font script="Hans" typeface="等线 Light"/>
+        <a:font script="Hant" typeface="新細明體"/>
+        <a:font script="Arab" typeface="Times New Roman"/>
+        <a:font script="Hebr" typeface="Times New Roman"/>
+        <a:font script="Thai" typeface="Angsana New"/>
+        <a:font script="Ethi" typeface="Nyala"/>
+        <a:font script="Beng" typeface="Vrinda"/>
+        <a:font script="Gujr" typeface="Shruti"/>
+        <a:font script="Khmr" typeface="MoolBoran"/>
+        <a:font script="Knda" typeface="Tunga"/>
+        <a:font script="Guru" typeface="Raavi"/>
+        <a:font script="Cans" typeface="Euphemia"/>
+        <a:font script="Cher" typeface="Plantagenet Cherokee"/>
+        <a:font script="Yiii" typeface="Microsoft Yi Baiti"/>
+        <a:font script="Tibt" typeface="Microsoft Himalaya"/>
+        <a:font script="Thaa" typeface="MV Boli"/>
+        <a:font script="Deva" typeface="Mangal"/>
+        <a:font script="Telu" typeface="Gautami"/>
+        <a:font script="Taml" typeface="Latha"/>
+        <a:font script="Syrc" typeface="Estrangelo Edessa"/>
+        <a:font script="Orya" typeface="Kalinga"/>
+        <a:font script="Mlym" typeface="Kartika"/>
+        <a:font script="Laoo" typeface="DokChampa"/>
+        <a:font script="Sinh" typeface="Iskoola Pota"/>
+        <a:font script="Mong" typeface="Mongolian Baiti"/>
+        <a:font script="Viet" typeface="Times New Roman"/>
+        <a:font script="Uigh" typeface="Microsoft Uighur"/>
+        <a:font script="Geor" typeface="Sylfaen"/>
+        <a:font script="Armn" typeface="Arial"/>
+        <a:font script="Bugi" typeface="Leelawadee UI"/>
+        <a:font script="Bopo" typeface="Microsoft JhengHei"/>
+        <a:font script="Java" typeface="Javanese Text"/>
+        <a:font script="Lisu" typeface="Segoe UI"/>
+        <a:font script="Mymr" typeface="Myanmar Text"/>
+        <a:font script="Nkoo" typeface="Ebrima"/>
+        <a:font script="Olck" typeface="Nirmala UI"/>
+        <a:font script="Osma" typeface="Ebrima"/>
+        <a:font script="Phag" typeface="Phagspa"/>
+        <a:font script="Syrn" typeface="Estrangelo Edessa"/>
+        <a:font script="Syrj" typeface="Estrangelo Edessa"/>
+        <a:font script="Syre" typeface="Estrangelo Edessa"/>
+        <a:font script="Sora" typeface="Nirmala UI"/>
+        <a:font script="Tale" typeface="Microsoft Tai Le"/>
+        <a:font script="Talu" typeface="Microsoft New Tai Lue"/>
+        <a:font script="Tfng" typeface="Ebrima"/>
+      </a:majorFont>
+      <a:minorFont>
+        <a:latin typeface="Aptos" panose="02110004020202020204"/>
+        <a:ea typeface=""/>
+        <a:cs typeface=""/>
+        <a:font script="Jpan" typeface="游ゴシック"/>
+        <a:font script="Hang" typeface="맑은 고딕"/>
+        <a:font script="Hans" typeface="等线"/>
+        <a:font script="Hant" typeface="新細明體"/>
+        <a:font script="Arab" typeface="Arial"/>
+        <a:font script="Hebr" typeface="Arial"/>
+        <a:font script="Thai" typeface="Cordia New"/>
+        <a:font script="Ethi" typeface="Nyala"/>
+        <a:font script="Beng" typeface="Vrinda"/>
+        <a:font script="Gujr" typeface="Shruti"/>
+        <a:font script="Khmr" typeface="DaunPenh"/>
+        <a:font script="Knda" typeface="Tunga"/>
+        <a:font script="Guru" typeface="Raavi"/>
+        <a:font script="Cans" typeface="Euphemia"/>
+        <a:font script="Cher" typeface="Plantagenet Cherokee"/>
+        <a:font script="Yiii" typeface="Microsoft Yi Baiti"/>
+        <a:font script="Tibt" typeface="Microsoft Himalaya"/>
+        <a:font script="Thaa" typeface="MV Boli"/>
+        <a:font script="Deva" typeface="Mangal"/>
+        <a:font script="Telu" typeface="Gautami"/>
+        <a:font script="Taml" typeface="Latha"/>
+        <a:font script="Syrc" typeface="Estrangelo Edessa"/>
+        <a:font script="Orya" typeface="Kalinga"/>
+        <a:font script="Mlym" typeface="Kartika"/>
+        <a:font script="Laoo" typeface="DokChampa"/>
+        <a:font script="Sinh" typeface="Iskoola Pota"/>
+        <a:font script="Mong" typeface="Mongolian Baiti"/>
+        <a:font script="Viet" typeface="Arial"/>
+        <a:font script="Uigh" typeface="Microsoft Uighur"/>
+        <a:font script="Geor" typeface="Sylfaen"/>
+        <a:font script="Armn" typeface="Arial"/>
+        <a:font script="Bugi" typeface="Leelawadee UI"/>
+        <a:font script="Bopo" typeface="Microsoft JhengHei"/>
+        <a:font script="Java" typeface="Javanese Text"/>
+        <a:font script="Lisu" typeface="Segoe UI"/>
+        <a:font script="Mymr" typeface="Myanmar Text"/>
+        <a:font script="Nkoo" typeface="Ebrima"/>
+        <a:font script="Olck" typeface="Nirmala UI"/>
+        <a:font script="Osma" typeface="Ebrima"/>
+        <a:font script="Phag" typeface="Phagspa"/>
+        <a:font script="Syrn" typeface="Estrangelo Edessa"/>
+        <a:font script="Syrj" typeface="Estrangelo Edessa"/>
+        <a:font script="Syre" typeface="Estrangelo Edessa"/>
+        <a:font script="Sora" typeface="Nirmala UI"/>
+        <a:font script="Tale" typeface="Microsoft Tai Le"/>
+        <a:font script="Talu" typeface="Microsoft New Tai Lue"/>
+        <a:font script="Tfng" typeface="Ebrima"/>
+      </a:minorFont>
+    </a:fontScheme>
+    <a:fmtScheme name="Office">
+      <a:fillStyleLst>
+        <a:solidFill>
+          <a:schemeClr val="phClr"/>
+        </a:solidFill>
+        <a:gradFill rotWithShape="1">
+          <a:gsLst>
+            <a:gs pos="0">
+              <a:schemeClr val="phClr">
+                <a:lumMod val="110000"/>
+                <a:satMod val="105000"/>
+                <a:tint val="67000"/>
+              </a:schemeClr>
+            </a:gs>
+            <a:gs pos="50000">
+              <a:schemeClr val="phClr">
+                <a:lumMod val="105000"/>
+                <a:satMod val="103000"/>
+                <a:tint val="73000"/>
+              </a:schemeClr>
+            </a:gs>
+            <a:gs pos="100000">
+              <a:schemeClr val="phClr">
+                <a:lumMod val="105000"/>
+                <a:satMod val="109000"/>
+                <a:tint val="81000"/>
+              </a:schemeClr>
+            </a:gs>
+          </a:gsLst>
+          <a:lin ang="5400000" scaled="0"/>
+        </a:gradFill>
+        <a:gradFill rotWithShape="1">
+          <a:gsLst>
+            <a:gs pos="0">
+              <a:schemeClr val="phClr">
+                <a:satMod val="103000"/>
+                <a:lumMod val="102000"/>
+                <a:tint val="94000"/>
+              </a:schemeClr>
+            </a:gs>
+            <a:gs pos="50000">
+              <a:schemeClr val="phClr">
+                <a:satMod val="110000"/>
+                <a:lumMod val="100000"/>
+                <a:shade val="100000"/>
+              </a:schemeClr>
+            </a:gs>
+            <a:gs pos="100000">
+              <a:schemeClr val="phClr">
+                <a:lumMod val="99000"/>
+                <a:satMod val="120000"/>
+                <a:shade val="78000"/>
+              </a:schemeClr>
+            </a:gs>
+          </a:gsLst>
+          <a:lin ang="5400000" scaled="0"/>
+        </a:gradFill>
+      </a:fillStyleLst>
+      <a:lnStyleLst>
+        <a:ln w="12700" cap="flat" cmpd="sng" algn="ctr">
+          <a:solidFill>
+            <a:schemeClr val="phClr"/>
+          </a:solidFill>
+          <a:prstDash val="solid"/>
+          <a:miter lim="800000"/>
+        </a:ln>
+        <a:ln w="19050" cap="flat" cmpd="sng" algn="ctr">
+          <a:solidFill>
+            <a:schemeClr val="phClr"/>
+          </a:solidFill>
+          <a:prstDash val="solid"/>
+          <a:miter lim="800000"/>
+        </a:ln>
+        <a:ln w="25400" cap="flat" cmpd="sng" algn="ctr">
+          <a:solidFill>
+            <a:schemeClr val="phClr"/>
+          </a:solidFill>
+          <a:prstDash val="solid"/>
+          <a:miter lim="800000"/>
+        </a:ln>
+      </a:lnStyleLst>
+      <a:effectStyleLst>
+        <a:effectStyle>
+          <a:effectLst/>
+        </a:effectStyle>
+        <a:effectStyle>
+          <a:effectLst/>
+        </a:effectStyle>
+        <a:effectStyle>
+          <a:effectLst>
+            <a:outerShdw blurRad="57150" dist="19050" dir="5400000" algn="ctr" rotWithShape="0">
+              <a:srgbClr val="000000">
+                <a:alpha val="63000"/>
+              </a:srgbClr>
+            </a:outerShdw>
+          </a:effectLst>
+        </a:effectStyle>
+      </a:effectStyleLst>
+      <a:bgFillStyleLst>
+        <a:solidFill>
+          <a:schemeClr val="phClr"/>
+        </a:solidFill>
+        <a:solidFill>
+          <a:schemeClr val="phClr">
+            <a:tint val="95000"/>
+            <a:satMod val="170000"/>
+          </a:schemeClr>
+        </a:solidFill>
+        <a:gradFill rotWithShape="1">
+          <a:gsLst>
+            <a:gs pos="0">
+              <a:schemeClr val="phClr">
+                <a:tint val="93000"/>
+                <a:satMod val="150000"/>
+                <a:shade val="98000"/>
+                <a:lumMod val="102000"/>
+              </a:schemeClr>
+            </a:gs>
+            <a:gs pos="50000">
+              <a:schemeClr val="phClr">
+                <a:tint val="98000"/>
+                <a:satMod val="130000"/>
+                <a:shade val="90000"/>
+                <a:lumMod val="103000"/>
+              </a:schemeClr>
+            </a:gs>
+            <a:gs pos="100000">
+              <a:schemeClr val="phClr">
+                <a:shade val="63000"/>
+                <a:satMod val="120000"/>
+              </a:schemeClr>
+            </a:gs>
+          </a:gsLst>
+          <a:lin ang="5400000" scaled="0"/>
+        </a:gradFill>
+      </a:bgFillStyleLst>
+    </a:fmtScheme>
+  </a:themeElements>
+  <a:objectDefaults>
+    <a:lnDef>
+      <a:spPr/>
+      <a:bodyPr/>
+      <a:lstStyle/>
+      <a:style>
+        <a:lnRef idx="2">
+          <a:schemeClr val="accent1"/>
+        </a:lnRef>
+        <a:fillRef idx="0">
+          <a:schemeClr val="accent1"/>
+        </a:fillRef>
+        <a:effectRef idx="1">
+          <a:schemeClr val="accent1"/>
+        </a:effectRef>
+        <a:fontRef idx="minor">
+          <a:schemeClr val="tx1"/>
+        </a:fontRef>
+      </a:style>
+    </a:lnDef>
+  </a:objectDefaults>
+  <a:extraClrSchemeLst/>
+  <a:extLst>
+    <a:ext uri="{05A4C25C-085E-4340-85A3-A5531E510DB2}">
+      <thm15:themeFamily xmlns:thm15="http://schemas.microsoft.com/office/thememl/2012/main" name="Office Theme" id="{2E142A2C-CD16-42D6-873A-C26D2A0506FA}" vid="{1BDDFF52-6CD6-40A5-AB3C-68EB2F1E4D0A}"/>
+    </a:ext>
+  </a:extLst>
+</a:theme>
 </file>